--- a/decks/hist-civil-rights/hist-civil-rights_ch6_malcolm-x.pptx
+++ b/decks/hist-civil-rights/hist-civil-rights_ch6_malcolm-x.pptx
@@ -129,30 +129,30 @@
   <p:extLst>
     <p:ext uri="{521415D9-36F7-43E2-AB2F-B90AF26B5E84}">
       <p14:sectionLst xmlns:p14="http://schemas.microsoft.com/office/powerpoint/2010/main">
-        <p14:section name="Opening" id="{083ea23c-38ab-4962-b840-abc3b71b32ed}">
+        <p14:section name="Opening" id="{7dbc2869-36d0-62b2-15b9-27b542f4f43d}">
           <p14:sldIdLst>
             <p14:sldId id="256"/>
           </p14:sldIdLst>
         </p14:section>
-        <p14:section name="Gate" id="{4a3fd964-70dd-2a03-9347-9f7b27e53825}">
+        <p14:section name="Gate" id="{f60ab09b-caac-3efd-e0b5-9422d2b47e97}">
           <p14:sldIdLst>
             <p14:sldId id="257"/>
             <p14:sldId id="258"/>
             <p14:sldId id="259"/>
           </p14:sldIdLst>
         </p14:section>
-        <p14:section name="Pre-teach" id="{a2c00aa1-fa6a-6a78-74fa-6183cfaa26b4}">
+        <p14:section name="Pre-teach" id="{b21cb217-d80c-8214-1f05-c55ed37de8b6}">
           <p14:sldIdLst>
             <p14:sldId id="260"/>
           </p14:sldIdLst>
         </p14:section>
-        <p14:section name="Read-along" id="{99cacbcf-a55f-14b2-a0b7-f6bceb861b2d}">
+        <p14:section name="Read-along" id="{04257162-2739-e01e-86bb-2d8522515c08}">
           <p14:sldIdLst>
             <p14:sldId id="261"/>
             <p14:sldId id="262"/>
           </p14:sldIdLst>
         </p14:section>
-        <p14:section name="Teach" id="{bebd6d34-bb59-7cae-3b72-a80fcefcb57d}">
+        <p14:section name="Teach" id="{f4fabd02-d1cc-37b3-9aa0-0767ea863734}">
           <p14:sldIdLst>
             <p14:sldId id="263"/>
             <p14:sldId id="264"/>
@@ -162,7 +162,7 @@
             <p14:sldId id="268"/>
           </p14:sldIdLst>
         </p14:section>
-        <p14:section name="Routes" id="{a852a0a8-2a64-fc71-93b2-4bb40f319074}">
+        <p14:section name="Routes" id="{4d425458-74dd-8e7f-c313-cc11b7cd9976}">
           <p14:sldIdLst>
             <p14:sldId id="269"/>
             <p14:sldId id="270"/>
@@ -171,12 +171,12 @@
             <p14:sldId id="273"/>
           </p14:sldIdLst>
         </p14:section>
-        <p14:section name="Close" id="{569f8c41-4e1e-66c8-61fe-fae74e23334e}">
+        <p14:section name="Close" id="{8c2f9510-2028-cc5e-85bb-b6390bff4b17}">
           <p14:sldIdLst>
             <p14:sldId id="274"/>
           </p14:sldIdLst>
         </p14:section>
-        <p14:section name="Answers" id="{56047907-8d2b-5ae5-558c-14d5dcd172f9}">
+        <p14:section name="Answers" id="{053420ff-3fea-92d6-c735-14fac899b7fa}">
           <p14:sldIdLst>
             <p14:sldId id="275"/>
             <p14:sldId id="276"/>
@@ -681,7 +681,7 @@
               <a:rPr lang="en-US" dirty="0"/>
               <a:t>Teach — Ideas that changed, and what held him back. Say it in your own words, then check understanding with a quick question: ask a pupil from the pre-teach group first, since they met these words and ideas before the lesson. Pupils try to recall before you re-explain.
 Malcolm X did not hold one fixed position all his life, and the change is examinable. By 1964 he had left the Nation of Islam and made a pilgrimage to Mecca, and he came back believing that white and Black people could work together to end racism and that he was arguing for human rights for every group in society. In a famous speech of 1964 he urged Black Americans to use their votes to change the American political system rather than to turn to violence, while insisting that white racism was so deeply rooted that Black people still needed the right to defend themselves. That was a major change of position, and he kept saying that King and the other groups had not done enough.
-His limitations are set out plainly in your lesson. Other Civil Rights groups labelled him an extremist and a radical. His support for violence put some people off him altogether. His claim that Islam was the true religion of all Black people did not win him support, because many Black Americans were Christians. And after President Kennedy was shot in 1963, his remark that America's own violence had come back on it upset many people, Black and white.
+His limitations are set out plainly in your lesson. Other Civil Rights groups labelled him an extremist and a radical. His support for violence put some people off him altogether. His claim that Islam was the one true faith for every Black person did not persuade people, because most Black Americans were Christians. And after President Kennedy was shot in 1963, his remark that America's own violence had come back on it upset many people, Black and white.
 So the record really is mixed, and that is what makes him a good subject for an interpretation question. He grew an organisation from a few hundred to tens of thousands and reached people King could not reach. He also alienated potential allies, including the ones with the power to pass laws.
 Worked example — model it step by step, thinking aloud: Explain one way in which Malcolm X's ideas changed, and one limitation on his impact. (1) Name the change: by 1964 he had left the Nation of Islam and, after a pilgrimage to Mecca, accepted that white and Black people could work together. (2) Evidence it: in his 1964 speech he urged Black Americans to use the vote rather than violence, while keeping the right to self-defence. (3) Name the limitation: other Civil Rights groups called him an extremist, and his support for violence put people off. (4) Explain the effect of the limitation: because the people who could pass laws were alienated, he had less influence over legislation than King. Answer: Change: by 1964, after Mecca, he accepted co-operation across races and urged use of the vote. Limitation: being labelled an extremist cost him allies among the people who could actually pass laws..
 Tip: A question about change needs two moments and a date. Say what he thought first, what he thought later, and when the shift happened.</a:t>
@@ -774,7 +774,7 @@
               <a:rPr lang="en-US" dirty="0"/>
               <a:t>Teach — Ideas that changed, and what held him back. Say it in your own words, then check understanding with a quick question: ask a pupil from the pre-teach group first, since they met these words and ideas before the lesson. Pupils try to recall before you re-explain.
 Malcolm X did not hold one fixed position all his life, and the change is examinable. By 1964 he had left the Nation of Islam and made a pilgrimage to Mecca, and he came back believing that white and Black people could work together to end racism and that he was arguing for human rights for every group in society. In a famous speech of 1964 he urged Black Americans to use their votes to change the American political system rather than to turn to violence, while insisting that white racism was so deeply rooted that Black people still needed the right to defend themselves. That was a major change of position, and he kept saying that King and the other groups had not done enough.
-His limitations are set out plainly in your lesson. Other Civil Rights groups labelled him an extremist and a radical. His support for violence put some people off him altogether. His claim that Islam was the true religion of all Black people did not win him support, because many Black Americans were Christians. And after President Kennedy was shot in 1963, his remark that America's own violence had come back on it upset many people, Black and white.
+His limitations are set out plainly in your lesson. Other Civil Rights groups labelled him an extremist and a radical. His support for violence put some people off him altogether. His claim that Islam was the one true faith for every Black person did not persuade people, because most Black Americans were Christians. And after President Kennedy was shot in 1963, his remark that America's own violence had come back on it upset many people, Black and white.
 So the record really is mixed, and that is what makes him a good subject for an interpretation question. He grew an organisation from a few hundred to tens of thousands and reached people King could not reach. He also alienated potential allies, including the ones with the power to pass laws.
 Worked example — model it step by step, thinking aloud: Explain one way in which Malcolm X's ideas changed, and one limitation on his impact. (1) Name the change: by 1964 he had left the Nation of Islam and, after a pilgrimage to Mecca, accepted that white and Black people could work together. (2) Evidence it: in his 1964 speech he urged Black Americans to use the vote rather than violence, while keeping the right to self-defence. (3) Name the limitation: other Civil Rights groups called him an extremist, and his support for violence put people off. (4) Explain the effect of the limitation: because the people who could pass laws were alienated, he had less influence over legislation than King. Answer: Change: by 1964, after Mecca, he accepted co-operation across races and urged use of the vote. Limitation: being labelled an extremist cost him allies among the people who could actually pass laws..
 Tip: A question about change needs two moments and a date. Say what he thought first, what he thought later, and when the shift happened.</a:t>
@@ -867,7 +867,7 @@
               <a:rPr lang="en-US" dirty="0"/>
               <a:t>Teach — Ideas that changed, and what held him back. Say it in your own words, then check understanding with a quick question: ask a pupil from the pre-teach group first, since they met these words and ideas before the lesson. Pupils try to recall before you re-explain.
 Malcolm X did not hold one fixed position all his life, and the change is examinable. By 1964 he had left the Nation of Islam and made a pilgrimage to Mecca, and he came back believing that white and Black people could work together to end racism and that he was arguing for human rights for every group in society. In a famous speech of 1964 he urged Black Americans to use their votes to change the American political system rather than to turn to violence, while insisting that white racism was so deeply rooted that Black people still needed the right to defend themselves. That was a major change of position, and he kept saying that King and the other groups had not done enough.
-His limitations are set out plainly in your lesson. Other Civil Rights groups labelled him an extremist and a radical. His support for violence put some people off him altogether. His claim that Islam was the true religion of all Black people did not win him support, because many Black Americans were Christians. And after President Kennedy was shot in 1963, his remark that America's own violence had come back on it upset many people, Black and white.
+His limitations are set out plainly in your lesson. Other Civil Rights groups labelled him an extremist and a radical. His support for violence put some people off him altogether. His claim that Islam was the one true faith for every Black person did not persuade people, because most Black Americans were Christians. And after President Kennedy was shot in 1963, his remark that America's own violence had come back on it upset many people, Black and white.
 So the record really is mixed, and that is what makes him a good subject for an interpretation question. He grew an organisation from a few hundred to tens of thousands and reached people King could not reach. He also alienated potential allies, including the ones with the power to pass laws.
 Worked example — model it step by step, thinking aloud: Explain one way in which Malcolm X's ideas changed, and one limitation on his impact. (1) Name the change: by 1964 he had left the Nation of Islam and, after a pilgrimage to Mecca, accepted that white and Black people could work together. (2) Evidence it: in his 1964 speech he urged Black Americans to use the vote rather than violence, while keeping the right to self-defence. (3) Name the limitation: other Civil Rights groups called him an extremist, and his support for violence put people off. (4) Explain the effect of the limitation: because the people who could pass laws were alienated, he had less influence over legislation than King. Answer: Change: by 1964, after Mecca, he accepted co-operation across races and urged use of the vote. Limitation: being labelled an extremist cost him allies among the people who could actually pass laws..
 Tip: A question about change needs two moments and a date. Say what he thought first, what he thought later, and when the shift happened.</a:t>
